--- a/presentation/kage_5min.pptx
+++ b/presentation/kage_5min.pptx
@@ -11,6 +11,7 @@
     <p:sldId id="259" r:id="rId11"/>
     <p:sldId id="260" r:id="rId12"/>
     <p:sldId id="261" r:id="rId13"/>
+    <p:sldId id="262" r:id="rId14"/>
   </p:sldIdLst>
   <p:sldSz cx="12191695" cy="6858000" type="screen4x3"/>
   <p:notesSz cx="6858000" cy="9144000"/>
@@ -1348,6 +1349,197 @@
           <a:p>
             <a:r>
               <a:t>  `dataset_write` / `job_start` calls — KAGE writes additive events.</a:t>
+            </a:r>
+          </a:p>
+          <a:p/>
+        </p:txBody>
+      </p:sp>
+      <p:sp>
+        <p:nvSpPr>
+          <p:cNvPr id="4" name="Slide Number Placeholder 3"/>
+          <p:cNvSpPr>
+            <a:spLocks noGrp="1"/>
+          </p:cNvSpPr>
+          <p:nvPr>
+            <p:ph type="sldNum" idx="5" sz="quarter"/>
+          </p:nvPr>
+        </p:nvSpPr>
+        <p:spPr/>
+      </p:sp>
+    </p:spTree>
+  </p:cSld>
+  <p:clrMapOvr>
+    <a:masterClrMapping/>
+  </p:clrMapOvr>
+</p:notes>
+</file>
+
+<file path=ppt/notesSlides/notesSlide7.xml><?xml version="1.0" encoding="utf-8"?>
+<p:notes xmlns:a="http://schemas.openxmlformats.org/drawingml/2006/main" xmlns:p="http://schemas.openxmlformats.org/presentationml/2006/main" xmlns:r="http://schemas.openxmlformats.org/officeDocument/2006/relationships">
+  <p:cSld>
+    <p:spTree>
+      <p:nvGrpSpPr>
+        <p:cNvPr id="1" name=""/>
+        <p:cNvGrpSpPr/>
+        <p:nvPr/>
+      </p:nvGrpSpPr>
+      <p:grpSpPr>
+        <a:xfrm>
+          <a:off x="0" y="0"/>
+          <a:ext cx="0" cy="0"/>
+          <a:chOff x="0" y="0"/>
+          <a:chExt cx="0" cy="0"/>
+        </a:xfrm>
+      </p:grpSpPr>
+      <p:sp>
+        <p:nvSpPr>
+          <p:cNvPr id="2" name="Slide Image Placeholder 1"/>
+          <p:cNvSpPr>
+            <a:spLocks noGrp="1"/>
+          </p:cNvSpPr>
+          <p:nvPr>
+            <p:ph type="sldImg" idx="2"/>
+          </p:nvPr>
+        </p:nvSpPr>
+        <p:spPr/>
+      </p:sp>
+      <p:sp>
+        <p:nvSpPr>
+          <p:cNvPr id="3" name="Notes Placeholder 2"/>
+          <p:cNvSpPr>
+            <a:spLocks noGrp="1"/>
+          </p:cNvSpPr>
+          <p:nvPr>
+            <p:ph type="body" idx="3" sz="quarter"/>
+          </p:nvPr>
+        </p:nvSpPr>
+        <p:spPr/>
+        <p:txBody>
+          <a:bodyPr/>
+          <a:lstStyle/>
+          <a:p>
+            <a:r>
+              <a:t># Slide 7 — Backup: KAGE × Databricks (skip unless asked)</a:t>
+            </a:r>
+          </a:p>
+          <a:p/>
+          <a:p>
+            <a:r>
+              <a:t>## When to show this slide</a:t>
+            </a:r>
+          </a:p>
+          <a:p>
+            <a:r>
+              <a:t>Only when someone asks "how is this different from what Databricks already gives me?"</a:t>
+            </a:r>
+          </a:p>
+          <a:p>
+            <a:r>
+              <a:t>Do NOT run through this in the 5-minute slot — it eats your buffer.</a:t>
+            </a:r>
+          </a:p>
+          <a:p/>
+          <a:p>
+            <a:r>
+              <a:t>## Framing (open with this)</a:t>
+            </a:r>
+          </a:p>
+          <a:p>
+            <a:r>
+              <a:t>&gt; "KAGE doesn't replace Databricks observability. It gives you the **same</a:t>
+            </a:r>
+          </a:p>
+          <a:p>
+            <a:r>
+              <a:t>&gt; lens across every platform you run** — Databricks, Snowflake, on-prem</a:t>
+            </a:r>
+          </a:p>
+          <a:p>
+            <a:r>
+              <a:t>&gt; Spark, dbt, Airflow — with medallion semantics, business custom fields,</a:t>
+            </a:r>
+          </a:p>
+          <a:p>
+            <a:r>
+              <a:t>&gt; and AI-suggested fixes built in."</a:t>
+            </a:r>
+          </a:p>
+          <a:p/>
+          <a:p>
+            <a:r>
+              <a:t>## Talking points (pick 2–3 based on the questioner)</a:t>
+            </a:r>
+          </a:p>
+          <a:p>
+            <a:r>
+              <a:t>- **Cross-platform schema** — same JSONL contract everywhere; one SQL spans all clouds.</a:t>
+            </a:r>
+          </a:p>
+          <a:p>
+            <a:r>
+              <a:t>- **Medallion semantics** — `layer` is a first-class column; gold survival % is a direct query, not a derivation.</a:t>
+            </a:r>
+          </a:p>
+          <a:p>
+            <a:r>
+              <a:t>- **You own the data** — JSONL in your Volume / S3 / ADLS; export and retention are yours, not Databricks'.</a:t>
+            </a:r>
+          </a:p>
+          <a:p>
+            <a:r>
+              <a:t>- **Custom business fields** — owner, SLA, cost center attach to every event.</a:t>
+            </a:r>
+          </a:p>
+          <a:p>
+            <a:r>
+              <a:t>- **Lineage outside Databricks** — Python/dbt/Airflow code emits `upstream_datasets`; Unity Catalog can't see those today.</a:t>
+            </a:r>
+          </a:p>
+          <a:p>
+            <a:r>
+              <a:t>- **AI suggestions** — every analytics query takes `model_name=…` and tacks on an `ai_query()` column with remediation per row.</a:t>
+            </a:r>
+          </a:p>
+          <a:p/>
+          <a:p>
+            <a:r>
+              <a:t>## Be honest about overlap (volunteer this)</a:t>
+            </a:r>
+          </a:p>
+          <a:p>
+            <a:r>
+              <a:t>- Column-level lineage *inside* Databricks → Unity Catalog wins, KAGE doesn't replace this.</a:t>
+            </a:r>
+          </a:p>
+          <a:p>
+            <a:r>
+              <a:t>- Lakehouse Monitoring covers profile / quality drift; KAGE's schema-drift query overlaps.</a:t>
+            </a:r>
+          </a:p>
+          <a:p>
+            <a:r>
+              <a:t>- Jobs UI shows job-level success/failure already — KAGE's value is making it cross-platform queryable.</a:t>
+            </a:r>
+          </a:p>
+          <a:p/>
+          <a:p>
+            <a:r>
+              <a:t>## Closing line (after they're convinced)</a:t>
+            </a:r>
+          </a:p>
+          <a:p>
+            <a:r>
+              <a:t>&gt; "Think of KAGE as the **glue** that makes Databricks observability portable</a:t>
+            </a:r>
+          </a:p>
+          <a:p>
+            <a:r>
+              <a:t>&gt; to the rest of your stack — and as the place to put your *business* context</a:t>
+            </a:r>
+          </a:p>
+          <a:p>
+            <a:r>
+              <a:t>&gt; next to the Databricks platform context."</a:t>
             </a:r>
           </a:p>
           <a:p/>
@@ -4414,8 +4606,8 @@
         </p:nvSpPr>
         <p:spPr>
           <a:xfrm>
-            <a:off x="11338560" y="6492240"/>
-            <a:ext cx="731520" cy="274320"/>
+            <a:off x="11155680" y="6492240"/>
+            <a:ext cx="914400" cy="274320"/>
           </a:xfrm>
           <a:prstGeom prst="rect">
             <a:avLst/>
@@ -4436,7 +4628,7 @@
                 </a:solidFill>
                 <a:latin typeface="Calibri"/>
               </a:rPr>
-              <a:t>1 / 6</a:t>
+              <a:t>1 / 7</a:t>
             </a:r>
           </a:p>
         </p:txBody>
@@ -4748,8 +4940,8 @@
         </p:nvSpPr>
         <p:spPr>
           <a:xfrm>
-            <a:off x="11338560" y="6492240"/>
-            <a:ext cx="731520" cy="274320"/>
+            <a:off x="11155680" y="6492240"/>
+            <a:ext cx="914400" cy="274320"/>
           </a:xfrm>
           <a:prstGeom prst="rect">
             <a:avLst/>
@@ -4770,7 +4962,7 @@
                 </a:solidFill>
                 <a:latin typeface="Calibri"/>
               </a:rPr>
-              <a:t>2 / 6</a:t>
+              <a:t>2 / 7</a:t>
             </a:r>
           </a:p>
         </p:txBody>
@@ -5106,8 +5298,8 @@
         </p:nvSpPr>
         <p:spPr>
           <a:xfrm>
-            <a:off x="11338560" y="6492240"/>
-            <a:ext cx="731520" cy="274320"/>
+            <a:off x="11155680" y="6492240"/>
+            <a:ext cx="914400" cy="274320"/>
           </a:xfrm>
           <a:prstGeom prst="rect">
             <a:avLst/>
@@ -5128,7 +5320,7 @@
                 </a:solidFill>
                 <a:latin typeface="Calibri"/>
               </a:rPr>
-              <a:t>3 / 6</a:t>
+              <a:t>3 / 7</a:t>
             </a:r>
           </a:p>
         </p:txBody>
@@ -5934,8 +6126,8 @@
         </p:nvSpPr>
         <p:spPr>
           <a:xfrm>
-            <a:off x="11338560" y="6492240"/>
-            <a:ext cx="731520" cy="274320"/>
+            <a:off x="11155680" y="6492240"/>
+            <a:ext cx="914400" cy="274320"/>
           </a:xfrm>
           <a:prstGeom prst="rect">
             <a:avLst/>
@@ -5956,7 +6148,7 @@
                 </a:solidFill>
                 <a:latin typeface="Calibri"/>
               </a:rPr>
-              <a:t>4 / 6</a:t>
+              <a:t>4 / 7</a:t>
             </a:r>
           </a:p>
         </p:txBody>
@@ -6383,8 +6575,8 @@
         </p:nvSpPr>
         <p:spPr>
           <a:xfrm>
-            <a:off x="11338560" y="6492240"/>
-            <a:ext cx="731520" cy="274320"/>
+            <a:off x="11155680" y="6492240"/>
+            <a:ext cx="914400" cy="274320"/>
           </a:xfrm>
           <a:prstGeom prst="rect">
             <a:avLst/>
@@ -6405,7 +6597,7 @@
                 </a:solidFill>
                 <a:latin typeface="Calibri"/>
               </a:rPr>
-              <a:t>5 / 6</a:t>
+              <a:t>5 / 7</a:t>
             </a:r>
           </a:p>
         </p:txBody>
@@ -6875,8 +7067,8 @@
         </p:nvSpPr>
         <p:spPr>
           <a:xfrm>
-            <a:off x="11338560" y="6492240"/>
-            <a:ext cx="731520" cy="274320"/>
+            <a:off x="11155680" y="6492240"/>
+            <a:ext cx="914400" cy="274320"/>
           </a:xfrm>
           <a:prstGeom prst="rect">
             <a:avLst/>
@@ -6897,7 +7089,7 @@
                 </a:solidFill>
                 <a:latin typeface="Calibri"/>
               </a:rPr>
-              <a:t>6 / 6</a:t>
+              <a:t>6 / 7</a:t>
             </a:r>
           </a:p>
         </p:txBody>
@@ -7302,6 +7494,953 @@
                 <a:latin typeface="Calibri"/>
               </a:rPr>
               <a:t>“`pip install kage` · 6-layer architecture diagram in `docs/architecture.html`”</a:t>
+            </a:r>
+          </a:p>
+        </p:txBody>
+      </p:sp>
+    </p:spTree>
+  </p:cSld>
+  <p:clrMapOvr>
+    <a:masterClrMapping/>
+  </p:clrMapOvr>
+</p:sld>
+</file>
+
+<file path=ppt/slides/slide7.xml><?xml version="1.0" encoding="utf-8"?>
+<p:sld xmlns:a="http://schemas.openxmlformats.org/drawingml/2006/main" xmlns:p="http://schemas.openxmlformats.org/presentationml/2006/main" xmlns:r="http://schemas.openxmlformats.org/officeDocument/2006/relationships">
+  <p:cSld>
+    <p:bg>
+      <p:bgPr>
+        <a:solidFill>
+          <a:srgbClr val="FFFFFF"/>
+        </a:solidFill>
+        <a:effectLst/>
+      </p:bgPr>
+    </p:bg>
+    <p:spTree>
+      <p:nvGrpSpPr>
+        <p:cNvPr id="1" name=""/>
+        <p:cNvGrpSpPr/>
+        <p:nvPr/>
+      </p:nvGrpSpPr>
+      <p:grpSpPr/>
+      <p:sp>
+        <p:nvSpPr>
+          <p:cNvPr id="2" name="Rectangle 1"/>
+          <p:cNvSpPr/>
+          <p:nvPr/>
+        </p:nvSpPr>
+        <p:spPr>
+          <a:xfrm>
+            <a:off x="0" y="0"/>
+            <a:ext cx="146304" cy="6858000"/>
+          </a:xfrm>
+          <a:prstGeom prst="rect">
+            <a:avLst/>
+          </a:prstGeom>
+          <a:solidFill>
+            <a:srgbClr val="2563EB"/>
+          </a:solidFill>
+          <a:ln>
+            <a:noFill/>
+          </a:ln>
+          <a:effectLst/>
+        </p:spPr>
+        <p:style>
+          <a:lnRef idx="1">
+            <a:schemeClr val="accent1"/>
+          </a:lnRef>
+          <a:fillRef idx="3">
+            <a:schemeClr val="accent1"/>
+          </a:fillRef>
+          <a:effectRef idx="2">
+            <a:schemeClr val="accent1"/>
+          </a:effectRef>
+          <a:fontRef idx="minor">
+            <a:schemeClr val="lt1"/>
+          </a:fontRef>
+        </p:style>
+        <p:txBody>
+          <a:bodyPr rtlCol="0" anchor="ctr"/>
+          <a:lstStyle/>
+          <a:p>
+            <a:pPr algn="ctr"/>
+          </a:p>
+        </p:txBody>
+      </p:sp>
+      <p:sp>
+        <p:nvSpPr>
+          <p:cNvPr id="3" name="TextBox 2"/>
+          <p:cNvSpPr txBox="1"/>
+          <p:nvPr/>
+        </p:nvSpPr>
+        <p:spPr>
+          <a:xfrm>
+            <a:off x="11155680" y="6492240"/>
+            <a:ext cx="914400" cy="274320"/>
+          </a:xfrm>
+          <a:prstGeom prst="rect">
+            <a:avLst/>
+          </a:prstGeom>
+          <a:noFill/>
+        </p:spPr>
+        <p:txBody>
+          <a:bodyPr wrap="square">
+            <a:spAutoFit/>
+          </a:bodyPr>
+          <a:lstStyle/>
+          <a:p>
+            <a:pPr algn="r"/>
+            <a:r>
+              <a:rPr sz="1100" b="0">
+                <a:solidFill>
+                  <a:srgbClr val="6B7280"/>
+                </a:solidFill>
+                <a:latin typeface="Calibri"/>
+              </a:rPr>
+              <a:t>7 / 7</a:t>
+            </a:r>
+          </a:p>
+        </p:txBody>
+      </p:sp>
+      <p:sp>
+        <p:nvSpPr>
+          <p:cNvPr id="4" name="TextBox 3"/>
+          <p:cNvSpPr txBox="1"/>
+          <p:nvPr/>
+        </p:nvSpPr>
+        <p:spPr>
+          <a:xfrm>
+            <a:off x="457200" y="320040"/>
+            <a:ext cx="11430000" cy="640080"/>
+          </a:xfrm>
+          <a:prstGeom prst="rect">
+            <a:avLst/>
+          </a:prstGeom>
+          <a:noFill/>
+        </p:spPr>
+        <p:txBody>
+          <a:bodyPr wrap="square">
+            <a:spAutoFit/>
+          </a:bodyPr>
+          <a:lstStyle/>
+          <a:p>
+            <a:pPr algn="l"/>
+            <a:r>
+              <a:rPr sz="2800" b="1">
+                <a:solidFill>
+                  <a:srgbClr val="1F2937"/>
+                </a:solidFill>
+                <a:latin typeface="Calibri"/>
+              </a:rPr>
+              <a:t>KAGE × Databricks — What KAGE Adds</a:t>
+            </a:r>
+          </a:p>
+        </p:txBody>
+      </p:sp>
+      <p:sp>
+        <p:nvSpPr>
+          <p:cNvPr id="5" name="TextBox 4"/>
+          <p:cNvSpPr txBox="1"/>
+          <p:nvPr/>
+        </p:nvSpPr>
+        <p:spPr>
+          <a:xfrm>
+            <a:off x="457200" y="960120"/>
+            <a:ext cx="11430000" cy="457200"/>
+          </a:xfrm>
+          <a:prstGeom prst="rect">
+            <a:avLst/>
+          </a:prstGeom>
+          <a:noFill/>
+        </p:spPr>
+        <p:txBody>
+          <a:bodyPr wrap="square">
+            <a:spAutoFit/>
+          </a:bodyPr>
+          <a:lstStyle/>
+          <a:p>
+            <a:pPr algn="l"/>
+            <a:r>
+              <a:rPr sz="1600" b="0">
+                <a:solidFill>
+                  <a:srgbClr val="2563EB"/>
+                </a:solidFill>
+                <a:latin typeface="Calibri"/>
+              </a:rPr>
+              <a:t>Extends Databricks observability; does not replace it.</a:t>
+            </a:r>
+          </a:p>
+        </p:txBody>
+      </p:sp>
+      <p:graphicFrame>
+        <p:nvGraphicFramePr>
+          <p:cNvPr id="6" name="kage_databricks_comparison"/>
+          <p:cNvGraphicFramePr>
+            <a:graphicFrameLocks noGrp="1"/>
+          </p:cNvGraphicFramePr>
+          <p:nvPr/>
+        </p:nvGraphicFramePr>
+        <p:xfrm>
+          <a:off x="457200" y="1508760"/>
+          <a:ext cx="11274552" cy="4800600"/>
+        </p:xfrm>
+        <a:graphic>
+          <a:graphicData uri="http://schemas.openxmlformats.org/drawingml/2006/table">
+            <a:tbl>
+              <a:tblPr firstRow="1" bandRow="1">
+                <a:tableStyleId>{5C22544A-7EE6-4342-B048-85BDC9FD1C3A}</a:tableStyleId>
+              </a:tblPr>
+              <a:tblGrid>
+                <a:gridCol w="2743200"/>
+                <a:gridCol w="4206240"/>
+                <a:gridCol w="4325112"/>
+              </a:tblGrid>
+              <a:tr h="480060">
+                <a:tc>
+                  <a:txBody>
+                    <a:bodyPr lIns="73152" rIns="73152" tIns="36576" bIns="36576" wrap="square"/>
+                    <a:lstStyle/>
+                    <a:p>
+                      <a:pPr algn="l"/>
+                      <a:r>
+                        <a:rPr sz="1200" b="1">
+                          <a:solidFill>
+                            <a:srgbClr val="FFFFFF"/>
+                          </a:solidFill>
+                          <a:latin typeface="Calibri"/>
+                        </a:rPr>
+                        <a:t>Capability</a:t>
+                      </a:r>
+                    </a:p>
+                  </a:txBody>
+                  <a:tcPr>
+                    <a:solidFill>
+                      <a:srgbClr val="2563EB"/>
+                    </a:solidFill>
+                  </a:tcPr>
+                </a:tc>
+                <a:tc>
+                  <a:txBody>
+                    <a:bodyPr lIns="73152" rIns="73152" tIns="36576" bIns="36576" wrap="square"/>
+                    <a:lstStyle/>
+                    <a:p>
+                      <a:pPr algn="l"/>
+                      <a:r>
+                        <a:rPr sz="1200" b="1">
+                          <a:solidFill>
+                            <a:srgbClr val="FFFFFF"/>
+                          </a:solidFill>
+                          <a:latin typeface="Calibri"/>
+                        </a:rPr>
+                        <a:t>Databricks today</a:t>
+                      </a:r>
+                    </a:p>
+                  </a:txBody>
+                  <a:tcPr>
+                    <a:solidFill>
+                      <a:srgbClr val="2563EB"/>
+                    </a:solidFill>
+                  </a:tcPr>
+                </a:tc>
+                <a:tc>
+                  <a:txBody>
+                    <a:bodyPr lIns="73152" rIns="73152" tIns="36576" bIns="36576" wrap="square"/>
+                    <a:lstStyle/>
+                    <a:p>
+                      <a:pPr algn="l"/>
+                      <a:r>
+                        <a:rPr sz="1200" b="1">
+                          <a:solidFill>
+                            <a:srgbClr val="FFFFFF"/>
+                          </a:solidFill>
+                          <a:latin typeface="Calibri"/>
+                        </a:rPr>
+                        <a:t>What KAGE adds</a:t>
+                      </a:r>
+                    </a:p>
+                  </a:txBody>
+                  <a:tcPr>
+                    <a:solidFill>
+                      <a:srgbClr val="2563EB"/>
+                    </a:solidFill>
+                  </a:tcPr>
+                </a:tc>
+              </a:tr>
+              <a:tr h="480060">
+                <a:tc>
+                  <a:txBody>
+                    <a:bodyPr lIns="73152" rIns="73152" tIns="36576" bIns="36576" wrap="square"/>
+                    <a:lstStyle/>
+                    <a:p>
+                      <a:pPr algn="l"/>
+                      <a:r>
+                        <a:rPr sz="1000" b="0">
+                          <a:solidFill>
+                            <a:srgbClr val="1F2937"/>
+                          </a:solidFill>
+                          <a:latin typeface="Calibri"/>
+                        </a:rPr>
+                        <a:t>Cross-platform schema</a:t>
+                      </a:r>
+                    </a:p>
+                  </a:txBody>
+                  <a:tcPr>
+                    <a:solidFill>
+                      <a:srgbClr val="FFFFFF"/>
+                    </a:solidFill>
+                  </a:tcPr>
+                </a:tc>
+                <a:tc>
+                  <a:txBody>
+                    <a:bodyPr lIns="73152" rIns="73152" tIns="36576" bIns="36576" wrap="square"/>
+                    <a:lstStyle/>
+                    <a:p>
+                      <a:pPr algn="l"/>
+                      <a:r>
+                        <a:rPr sz="1000" b="0">
+                          <a:solidFill>
+                            <a:srgbClr val="1F2937"/>
+                          </a:solidFill>
+                          <a:latin typeface="Calibri"/>
+                        </a:rPr>
+                        <a:t>Unity Catalog &amp; system tables are Databricks-only</a:t>
+                      </a:r>
+                    </a:p>
+                  </a:txBody>
+                  <a:tcPr>
+                    <a:solidFill>
+                      <a:srgbClr val="FFFFFF"/>
+                    </a:solidFill>
+                  </a:tcPr>
+                </a:tc>
+                <a:tc>
+                  <a:txBody>
+                    <a:bodyPr lIns="73152" rIns="73152" tIns="36576" bIns="36576" wrap="square"/>
+                    <a:lstStyle/>
+                    <a:p>
+                      <a:pPr algn="l"/>
+                      <a:r>
+                        <a:rPr sz="1000" b="0">
+                          <a:solidFill>
+                            <a:srgbClr val="1F2937"/>
+                          </a:solidFill>
+                          <a:latin typeface="Calibri"/>
+                        </a:rPr>
+                        <a:t>One JSONL contract across Spark, Glue, Synapse, Snowflake, dbt, Airflow, plain Python</a:t>
+                      </a:r>
+                    </a:p>
+                  </a:txBody>
+                  <a:tcPr>
+                    <a:solidFill>
+                      <a:srgbClr val="FFFFFF"/>
+                    </a:solidFill>
+                  </a:tcPr>
+                </a:tc>
+              </a:tr>
+              <a:tr h="480060">
+                <a:tc>
+                  <a:txBody>
+                    <a:bodyPr lIns="73152" rIns="73152" tIns="36576" bIns="36576" wrap="square"/>
+                    <a:lstStyle/>
+                    <a:p>
+                      <a:pPr algn="l"/>
+                      <a:r>
+                        <a:rPr sz="1000" b="0">
+                          <a:solidFill>
+                            <a:srgbClr val="1F2937"/>
+                          </a:solidFill>
+                          <a:latin typeface="Calibri"/>
+                        </a:rPr>
+                        <a:t>Medallion as first-class</a:t>
+                      </a:r>
+                    </a:p>
+                  </a:txBody>
+                  <a:tcPr>
+                    <a:solidFill>
+                      <a:srgbClr val="F3F4F6"/>
+                    </a:solidFill>
+                  </a:tcPr>
+                </a:tc>
+                <a:tc>
+                  <a:txBody>
+                    <a:bodyPr lIns="73152" rIns="73152" tIns="36576" bIns="36576" wrap="square"/>
+                    <a:lstStyle/>
+                    <a:p>
+                      <a:pPr algn="l"/>
+                      <a:r>
+                        <a:rPr sz="1000" b="0">
+                          <a:solidFill>
+                            <a:srgbClr val="1F2937"/>
+                          </a:solidFill>
+                          <a:latin typeface="Calibri"/>
+                        </a:rPr>
+                        <a:t>Lineage knows tables, not layers</a:t>
+                      </a:r>
+                    </a:p>
+                  </a:txBody>
+                  <a:tcPr>
+                    <a:solidFill>
+                      <a:srgbClr val="F3F4F6"/>
+                    </a:solidFill>
+                  </a:tcPr>
+                </a:tc>
+                <a:tc>
+                  <a:txBody>
+                    <a:bodyPr lIns="73152" rIns="73152" tIns="36576" bIns="36576" wrap="square"/>
+                    <a:lstStyle/>
+                    <a:p>
+                      <a:pPr algn="l"/>
+                      <a:r>
+                        <a:rPr sz="1000" b="0">
+                          <a:solidFill>
+                            <a:srgbClr val="1F2937"/>
+                          </a:solidFill>
+                          <a:latin typeface="Calibri"/>
+                        </a:rPr>
+                        <a:t>Every event carries `layer` — direct "gold survival %" queries, no joins</a:t>
+                      </a:r>
+                    </a:p>
+                  </a:txBody>
+                  <a:tcPr>
+                    <a:solidFill>
+                      <a:srgbClr val="F3F4F6"/>
+                    </a:solidFill>
+                  </a:tcPr>
+                </a:tc>
+              </a:tr>
+              <a:tr h="480060">
+                <a:tc>
+                  <a:txBody>
+                    <a:bodyPr lIns="73152" rIns="73152" tIns="36576" bIns="36576" wrap="square"/>
+                    <a:lstStyle/>
+                    <a:p>
+                      <a:pPr algn="l"/>
+                      <a:r>
+                        <a:rPr sz="1000" b="0">
+                          <a:solidFill>
+                            <a:srgbClr val="1F2937"/>
+                          </a:solidFill>
+                          <a:latin typeface="Calibri"/>
+                        </a:rPr>
+                        <a:t>You own the storage</a:t>
+                      </a:r>
+                    </a:p>
+                  </a:txBody>
+                  <a:tcPr>
+                    <a:solidFill>
+                      <a:srgbClr val="FFFFFF"/>
+                    </a:solidFill>
+                  </a:tcPr>
+                </a:tc>
+                <a:tc>
+                  <a:txBody>
+                    <a:bodyPr lIns="73152" rIns="73152" tIns="36576" bIns="36576" wrap="square"/>
+                    <a:lstStyle/>
+                    <a:p>
+                      <a:pPr algn="l"/>
+                      <a:r>
+                        <a:rPr sz="1000" b="0">
+                          <a:solidFill>
+                            <a:srgbClr val="1F2937"/>
+                          </a:solidFill>
+                          <a:latin typeface="Calibri"/>
+                        </a:rPr>
+                        <a:t>System tables retained per Databricks policy</a:t>
+                      </a:r>
+                    </a:p>
+                  </a:txBody>
+                  <a:tcPr>
+                    <a:solidFill>
+                      <a:srgbClr val="FFFFFF"/>
+                    </a:solidFill>
+                  </a:tcPr>
+                </a:tc>
+                <a:tc>
+                  <a:txBody>
+                    <a:bodyPr lIns="73152" rIns="73152" tIns="36576" bIns="36576" wrap="square"/>
+                    <a:lstStyle/>
+                    <a:p>
+                      <a:pPr algn="l"/>
+                      <a:r>
+                        <a:rPr sz="1000" b="0">
+                          <a:solidFill>
+                            <a:srgbClr val="1F2937"/>
+                          </a:solidFill>
+                          <a:latin typeface="Calibri"/>
+                        </a:rPr>
+                        <a:t>Plain JSONL in your Volume / S3 / ADLS — your retention, your export</a:t>
+                      </a:r>
+                    </a:p>
+                  </a:txBody>
+                  <a:tcPr>
+                    <a:solidFill>
+                      <a:srgbClr val="FFFFFF"/>
+                    </a:solidFill>
+                  </a:tcPr>
+                </a:tc>
+              </a:tr>
+              <a:tr h="480060">
+                <a:tc>
+                  <a:txBody>
+                    <a:bodyPr lIns="73152" rIns="73152" tIns="36576" bIns="36576" wrap="square"/>
+                    <a:lstStyle/>
+                    <a:p>
+                      <a:pPr algn="l"/>
+                      <a:r>
+                        <a:rPr sz="1000" b="0">
+                          <a:solidFill>
+                            <a:srgbClr val="1F2937"/>
+                          </a:solidFill>
+                          <a:latin typeface="Calibri"/>
+                        </a:rPr>
+                        <a:t>Business custom fields</a:t>
+                      </a:r>
+                    </a:p>
+                  </a:txBody>
+                  <a:tcPr>
+                    <a:solidFill>
+                      <a:srgbClr val="F3F4F6"/>
+                    </a:solidFill>
+                  </a:tcPr>
+                </a:tc>
+                <a:tc>
+                  <a:txBody>
+                    <a:bodyPr lIns="73152" rIns="73152" tIns="36576" bIns="36576" wrap="square"/>
+                    <a:lstStyle/>
+                    <a:p>
+                      <a:pPr algn="l"/>
+                      <a:r>
+                        <a:rPr sz="1000" b="0">
+                          <a:solidFill>
+                            <a:srgbClr val="1F2937"/>
+                          </a:solidFill>
+                          <a:latin typeface="Calibri"/>
+                        </a:rPr>
+                        <a:t>Cluster tags don't reach the event stream</a:t>
+                      </a:r>
+                    </a:p>
+                  </a:txBody>
+                  <a:tcPr>
+                    <a:solidFill>
+                      <a:srgbClr val="F3F4F6"/>
+                    </a:solidFill>
+                  </a:tcPr>
+                </a:tc>
+                <a:tc>
+                  <a:txBody>
+                    <a:bodyPr lIns="73152" rIns="73152" tIns="36576" bIns="36576" wrap="square"/>
+                    <a:lstStyle/>
+                    <a:p>
+                      <a:pPr algn="l"/>
+                      <a:r>
+                        <a:rPr sz="1000" b="0">
+                          <a:solidFill>
+                            <a:srgbClr val="1F2937"/>
+                          </a:solidFill>
+                          <a:latin typeface="Calibri"/>
+                        </a:rPr>
+                        <a:t>`custom_fields={owner, sla_minutes, cost_center}` on every event</a:t>
+                      </a:r>
+                    </a:p>
+                  </a:txBody>
+                  <a:tcPr>
+                    <a:solidFill>
+                      <a:srgbClr val="F3F4F6"/>
+                    </a:solidFill>
+                  </a:tcPr>
+                </a:tc>
+              </a:tr>
+              <a:tr h="480060">
+                <a:tc>
+                  <a:txBody>
+                    <a:bodyPr lIns="73152" rIns="73152" tIns="36576" bIns="36576" wrap="square"/>
+                    <a:lstStyle/>
+                    <a:p>
+                      <a:pPr algn="l"/>
+                      <a:r>
+                        <a:rPr sz="1000" b="0">
+                          <a:solidFill>
+                            <a:srgbClr val="1F2937"/>
+                          </a:solidFill>
+                          <a:latin typeface="Calibri"/>
+                        </a:rPr>
+                        <a:t>Lineage outside Databricks</a:t>
+                      </a:r>
+                    </a:p>
+                  </a:txBody>
+                  <a:tcPr>
+                    <a:solidFill>
+                      <a:srgbClr val="FFFFFF"/>
+                    </a:solidFill>
+                  </a:tcPr>
+                </a:tc>
+                <a:tc>
+                  <a:txBody>
+                    <a:bodyPr lIns="73152" rIns="73152" tIns="36576" bIns="36576" wrap="square"/>
+                    <a:lstStyle/>
+                    <a:p>
+                      <a:pPr algn="l"/>
+                      <a:r>
+                        <a:rPr sz="1000" b="0">
+                          <a:solidFill>
+                            <a:srgbClr val="1F2937"/>
+                          </a:solidFill>
+                          <a:latin typeface="Calibri"/>
+                        </a:rPr>
+                        <a:t>UC lineage requires Databricks reads/writes</a:t>
+                      </a:r>
+                    </a:p>
+                  </a:txBody>
+                  <a:tcPr>
+                    <a:solidFill>
+                      <a:srgbClr val="FFFFFF"/>
+                    </a:solidFill>
+                  </a:tcPr>
+                </a:tc>
+                <a:tc>
+                  <a:txBody>
+                    <a:bodyPr lIns="73152" rIns="73152" tIns="36576" bIns="36576" wrap="square"/>
+                    <a:lstStyle/>
+                    <a:p>
+                      <a:pPr algn="l"/>
+                      <a:r>
+                        <a:rPr sz="1000" b="0">
+                          <a:solidFill>
+                            <a:srgbClr val="1F2937"/>
+                          </a:solidFill>
+                          <a:latin typeface="Calibri"/>
+                        </a:rPr>
+                        <a:t>`upstream_datasets=[...]` works from pandas, dbt, Airflow operators</a:t>
+                      </a:r>
+                    </a:p>
+                  </a:txBody>
+                  <a:tcPr>
+                    <a:solidFill>
+                      <a:srgbClr val="FFFFFF"/>
+                    </a:solidFill>
+                  </a:tcPr>
+                </a:tc>
+              </a:tr>
+              <a:tr h="480060">
+                <a:tc>
+                  <a:txBody>
+                    <a:bodyPr lIns="73152" rIns="73152" tIns="36576" bIns="36576" wrap="square"/>
+                    <a:lstStyle/>
+                    <a:p>
+                      <a:pPr algn="l"/>
+                      <a:r>
+                        <a:rPr sz="1000" b="0">
+                          <a:solidFill>
+                            <a:srgbClr val="1F2937"/>
+                          </a:solidFill>
+                          <a:latin typeface="Calibri"/>
+                        </a:rPr>
+                        <a:t>AI-suggested remediation</a:t>
+                      </a:r>
+                    </a:p>
+                  </a:txBody>
+                  <a:tcPr>
+                    <a:solidFill>
+                      <a:srgbClr val="F3F4F6"/>
+                    </a:solidFill>
+                  </a:tcPr>
+                </a:tc>
+                <a:tc>
+                  <a:txBody>
+                    <a:bodyPr lIns="73152" rIns="73152" tIns="36576" bIns="36576" wrap="square"/>
+                    <a:lstStyle/>
+                    <a:p>
+                      <a:pPr algn="l"/>
+                      <a:r>
+                        <a:rPr sz="1000" b="0">
+                          <a:solidFill>
+                            <a:srgbClr val="1F2937"/>
+                          </a:solidFill>
+                          <a:latin typeface="Calibri"/>
+                        </a:rPr>
+                        <a:t>Not in built-in observability today</a:t>
+                      </a:r>
+                    </a:p>
+                  </a:txBody>
+                  <a:tcPr>
+                    <a:solidFill>
+                      <a:srgbClr val="F3F4F6"/>
+                    </a:solidFill>
+                  </a:tcPr>
+                </a:tc>
+                <a:tc>
+                  <a:txBody>
+                    <a:bodyPr lIns="73152" rIns="73152" tIns="36576" bIns="36576" wrap="square"/>
+                    <a:lstStyle/>
+                    <a:p>
+                      <a:pPr algn="l"/>
+                      <a:r>
+                        <a:rPr sz="1000" b="0">
+                          <a:solidFill>
+                            <a:srgbClr val="1F2937"/>
+                          </a:solidFill>
+                          <a:latin typeface="Calibri"/>
+                        </a:rPr>
+                        <a:t>`ai_query()` column on every analytics SQL — LLM fix per error / bottleneck</a:t>
+                      </a:r>
+                    </a:p>
+                  </a:txBody>
+                  <a:tcPr>
+                    <a:solidFill>
+                      <a:srgbClr val="F3F4F6"/>
+                    </a:solidFill>
+                  </a:tcPr>
+                </a:tc>
+              </a:tr>
+              <a:tr h="480060">
+                <a:tc>
+                  <a:txBody>
+                    <a:bodyPr lIns="73152" rIns="73152" tIns="36576" bIns="36576" wrap="square"/>
+                    <a:lstStyle/>
+                    <a:p>
+                      <a:pPr algn="l"/>
+                      <a:r>
+                        <a:rPr sz="1000" b="0">
+                          <a:solidFill>
+                            <a:srgbClr val="1F2937"/>
+                          </a:solidFill>
+                          <a:latin typeface="Calibri"/>
+                        </a:rPr>
+                        <a:t>Cost attribution by layer</a:t>
+                      </a:r>
+                    </a:p>
+                  </a:txBody>
+                  <a:tcPr>
+                    <a:solidFill>
+                      <a:srgbClr val="FFFFFF"/>
+                    </a:solidFill>
+                  </a:tcPr>
+                </a:tc>
+                <a:tc>
+                  <a:txBody>
+                    <a:bodyPr lIns="73152" rIns="73152" tIns="36576" bIns="36576" wrap="square"/>
+                    <a:lstStyle/>
+                    <a:p>
+                      <a:pPr algn="l"/>
+                      <a:r>
+                        <a:rPr sz="1000" b="0">
+                          <a:solidFill>
+                            <a:srgbClr val="1F2937"/>
+                          </a:solidFill>
+                          <a:latin typeface="Calibri"/>
+                        </a:rPr>
+                        <a:t>Billing is cluster-level</a:t>
+                      </a:r>
+                    </a:p>
+                  </a:txBody>
+                  <a:tcPr>
+                    <a:solidFill>
+                      <a:srgbClr val="FFFFFF"/>
+                    </a:solidFill>
+                  </a:tcPr>
+                </a:tc>
+                <a:tc>
+                  <a:txBody>
+                    <a:bodyPr lIns="73152" rIns="73152" tIns="36576" bIns="36576" wrap="square"/>
+                    <a:lstStyle/>
+                    <a:p>
+                      <a:pPr algn="l"/>
+                      <a:r>
+                        <a:rPr sz="1000" b="0">
+                          <a:solidFill>
+                            <a:srgbClr val="1F2937"/>
+                          </a:solidFill>
+                          <a:latin typeface="Calibri"/>
+                        </a:rPr>
+                        <a:t>Synthetic cost per pipeline × layer × records — chargeback ready</a:t>
+                      </a:r>
+                    </a:p>
+                  </a:txBody>
+                  <a:tcPr>
+                    <a:solidFill>
+                      <a:srgbClr val="FFFFFF"/>
+                    </a:solidFill>
+                  </a:tcPr>
+                </a:tc>
+              </a:tr>
+              <a:tr h="480060">
+                <a:tc>
+                  <a:txBody>
+                    <a:bodyPr lIns="73152" rIns="73152" tIns="36576" bIns="36576" wrap="square"/>
+                    <a:lstStyle/>
+                    <a:p>
+                      <a:pPr algn="l"/>
+                      <a:r>
+                        <a:rPr sz="1000" b="0">
+                          <a:solidFill>
+                            <a:srgbClr val="1F2937"/>
+                          </a:solidFill>
+                          <a:latin typeface="Calibri"/>
+                        </a:rPr>
+                        <a:t>DLT overlay without rewrites</a:t>
+                      </a:r>
+                    </a:p>
+                  </a:txBody>
+                  <a:tcPr>
+                    <a:solidFill>
+                      <a:srgbClr val="F3F4F6"/>
+                    </a:solidFill>
+                  </a:tcPr>
+                </a:tc>
+                <a:tc>
+                  <a:txBody>
+                    <a:bodyPr lIns="73152" rIns="73152" tIns="36576" bIns="36576" wrap="square"/>
+                    <a:lstStyle/>
+                    <a:p>
+                      <a:pPr algn="l"/>
+                      <a:r>
+                        <a:rPr sz="1000" b="0">
+                          <a:solidFill>
+                            <a:srgbClr val="1F2937"/>
+                          </a:solidFill>
+                          <a:latin typeface="Calibri"/>
+                        </a:rPr>
+                        <a:t>DLT metrics are what DLT exposes</a:t>
+                      </a:r>
+                    </a:p>
+                  </a:txBody>
+                  <a:tcPr>
+                    <a:solidFill>
+                      <a:srgbClr val="F3F4F6"/>
+                    </a:solidFill>
+                  </a:tcPr>
+                </a:tc>
+                <a:tc>
+                  <a:txBody>
+                    <a:bodyPr lIns="73152" rIns="73152" tIns="36576" bIns="36576" wrap="square"/>
+                    <a:lstStyle/>
+                    <a:p>
+                      <a:pPr algn="l"/>
+                      <a:r>
+                        <a:rPr sz="1000" b="0">
+                          <a:solidFill>
+                            <a:srgbClr val="1F2937"/>
+                          </a:solidFill>
+                          <a:latin typeface="Calibri"/>
+                        </a:rPr>
+                        <a:t>`@kage_dlt_table` adds your business context at materialization time</a:t>
+                      </a:r>
+                    </a:p>
+                  </a:txBody>
+                  <a:tcPr>
+                    <a:solidFill>
+                      <a:srgbClr val="F3F4F6"/>
+                    </a:solidFill>
+                  </a:tcPr>
+                </a:tc>
+              </a:tr>
+              <a:tr h="480060">
+                <a:tc>
+                  <a:txBody>
+                    <a:bodyPr lIns="73152" rIns="73152" tIns="36576" bIns="36576" wrap="square"/>
+                    <a:lstStyle/>
+                    <a:p>
+                      <a:pPr algn="l"/>
+                      <a:r>
+                        <a:rPr sz="1000" b="0">
+                          <a:solidFill>
+                            <a:srgbClr val="1F2937"/>
+                          </a:solidFill>
+                          <a:latin typeface="Calibri"/>
+                        </a:rPr>
+                        <a:t>Deployment</a:t>
+                      </a:r>
+                    </a:p>
+                  </a:txBody>
+                  <a:tcPr>
+                    <a:solidFill>
+                      <a:srgbClr val="FFFFFF"/>
+                    </a:solidFill>
+                  </a:tcPr>
+                </a:tc>
+                <a:tc>
+                  <a:txBody>
+                    <a:bodyPr lIns="73152" rIns="73152" tIns="36576" bIns="36576" wrap="square"/>
+                    <a:lstStyle/>
+                    <a:p>
+                      <a:pPr algn="l"/>
+                      <a:r>
+                        <a:rPr sz="1000" b="0">
+                          <a:solidFill>
+                            <a:srgbClr val="1F2937"/>
+                          </a:solidFill>
+                          <a:latin typeface="Calibri"/>
+                        </a:rPr>
+                        <a:t>Tied to Databricks runtime</a:t>
+                      </a:r>
+                    </a:p>
+                  </a:txBody>
+                  <a:tcPr>
+                    <a:solidFill>
+                      <a:srgbClr val="FFFFFF"/>
+                    </a:solidFill>
+                  </a:tcPr>
+                </a:tc>
+                <a:tc>
+                  <a:txBody>
+                    <a:bodyPr lIns="73152" rIns="73152" tIns="36576" bIns="36576" wrap="square"/>
+                    <a:lstStyle/>
+                    <a:p>
+                      <a:pPr algn="l"/>
+                      <a:r>
+                        <a:rPr sz="1000" b="0">
+                          <a:solidFill>
+                            <a:srgbClr val="1F2937"/>
+                          </a:solidFill>
+                          <a:latin typeface="Calibri"/>
+                        </a:rPr>
+                        <a:t>`pip install kage` — &lt;10 ms / event, library-only, no agent</a:t>
+                      </a:r>
+                    </a:p>
+                  </a:txBody>
+                  <a:tcPr>
+                    <a:solidFill>
+                      <a:srgbClr val="FFFFFF"/>
+                    </a:solidFill>
+                  </a:tcPr>
+                </a:tc>
+              </a:tr>
+            </a:tbl>
+          </a:graphicData>
+        </a:graphic>
+      </p:graphicFrame>
+      <p:sp>
+        <p:nvSpPr>
+          <p:cNvPr id="7" name="TextBox 6"/>
+          <p:cNvSpPr txBox="1"/>
+          <p:nvPr/>
+        </p:nvSpPr>
+        <p:spPr>
+          <a:xfrm>
+            <a:off x="457200" y="6263640"/>
+            <a:ext cx="11430000" cy="411480"/>
+          </a:xfrm>
+          <a:prstGeom prst="rect">
+            <a:avLst/>
+          </a:prstGeom>
+          <a:noFill/>
+        </p:spPr>
+        <p:txBody>
+          <a:bodyPr wrap="square">
+            <a:spAutoFit/>
+          </a:bodyPr>
+          <a:lstStyle/>
+          <a:p>
+            <a:pPr algn="ctr"/>
+            <a:r>
+              <a:rPr sz="1300" b="0">
+                <a:solidFill>
+                  <a:srgbClr val="6B7280"/>
+                </a:solidFill>
+                <a:latin typeface="Calibri"/>
+              </a:rPr>
+              <a:t>“"Same lens across every platform you run — medallion-aware, AI-augmented."”</a:t>
             </a:r>
           </a:p>
         </p:txBody>

--- a/presentation/kage_5min.pptx
+++ b/presentation/kage_5min.pptx
@@ -793,7 +793,7 @@
           </a:p>
           <a:p>
             <a:r>
-              <a:t>Tiny surface area, lakehouse-shaped output.</a:t>
+              <a:t>Tiny surface area, lakehouse-shaped output. Two paradigms — ETL **and** agentic — sharing one event stream.</a:t>
             </a:r>
           </a:p>
           <a:p/>
@@ -804,37 +804,37 @@
           </a:p>
           <a:p>
             <a:r>
-              <a:t>1. **3 event types** — that's the entire data model. Easy to remember.</a:t>
-            </a:r>
-          </a:p>
-          <a:p>
-            <a:r>
-              <a:t>2. **2 APIs** — `KageLogger` for explicit control, `@` decorators for</a:t>
-            </a:r>
-          </a:p>
-          <a:p>
-            <a:r>
-              <a:t>   zero-boilerplate. Use either, mix freely.</a:t>
-            </a:r>
-          </a:p>
-          <a:p>
-            <a:r>
-              <a:t>3. **JSONL on disk** — no daemon, no agent, no separate database.</a:t>
-            </a:r>
-          </a:p>
-          <a:p>
-            <a:r>
-              <a:t>4. **Partitioned path** = direct SQL: `SELECT * FROM json.\`…/event_type=job_run/\``.</a:t>
-            </a:r>
-          </a:p>
-          <a:p>
-            <a:r>
-              <a:t>5. **Medallion-aware** — every event carries `layer`, so lineage and</a:t>
-            </a:r>
-          </a:p>
-          <a:p>
-            <a:r>
-              <a:t>   survival-rate metrics fall out for free.</a:t>
+              <a:t>1. **3 event types** — `job_run`, `task_run`, `dataset_event`. The entire data model.</a:t>
+            </a:r>
+          </a:p>
+          <a:p>
+            <a:r>
+              <a:t>2. **Two API flavors** —</a:t>
+            </a:r>
+          </a:p>
+          <a:p>
+            <a:r>
+              <a:t>   - ETL: `@pipeline` / `@task(layer=…)` / `@dataset(layer=…)` for medallion pipelines.</a:t>
+            </a:r>
+          </a:p>
+          <a:p>
+            <a:r>
+              <a:t>   - Agentic: `@agent` / `@step` / `@tool` / `@llm_call` for spans (no medallion required).</a:t>
+            </a:r>
+          </a:p>
+          <a:p>
+            <a:r>
+              <a:t>3. **Four adapters** — DLT, dbt, Airflow, LangChain. Same JSONL output.</a:t>
+            </a:r>
+          </a:p>
+          <a:p>
+            <a:r>
+              <a:t>4. **Core engine** — thread-safe lock for ETL parallelism; `contextvars` span stack for agentic parallelism (asyncio.gather + ThreadPool with copy_context).</a:t>
+            </a:r>
+          </a:p>
+          <a:p>
+            <a:r>
+              <a:t>5. **JSONL on disk** — no daemon, no agent, no separate database. SQL it directly.</a:t>
             </a:r>
           </a:p>
           <a:p/>
@@ -850,7 +850,7 @@
           </a:p>
           <a:p>
             <a:r>
-              <a:t>User Code → API → Core → Transports → Storage → Analytics.</a:t>
+              <a:t>User Code → KAGE API → Adapters → Core Engine → Storage → Analytics.</a:t>
             </a:r>
           </a:p>
           <a:p/>
@@ -5390,7 +5390,7 @@
                 </a:solidFill>
                 <a:latin typeface="Calibri"/>
               </a:rPr>
-              <a:t>3 event types · 2 APIs · 1 lakehouse-ready stream</a:t>
+              <a:t>3 event types · ETL + Agentic APIs · 4 adapters · 1 JSONL stream</a:t>
             </a:r>
           </a:p>
         </p:txBody>
@@ -5457,7 +5457,7 @@
                 </a:solidFill>
                 <a:latin typeface="Calibri"/>
               </a:rPr>
-              <a:t>PySpark · DLT / Lakeflow · dbt · Airflow · Python</a:t>
+              <a:t>PySpark · DLT · dbt · Airflow · LangChain / LangGraph · async agents</a:t>
             </a:r>
           </a:p>
         </p:txBody>
@@ -5560,7 +5560,7 @@
                 </a:solidFill>
                 <a:latin typeface="Calibri"/>
               </a:rPr>
-              <a:t>@pipeline · @task · @dataset · @kage_dlt_table · KageLogger</a:t>
+              <a:t>ETL: @pipeline / @task / @dataset    Agentic: @agent / @step / @tool / @llm_call</a:t>
             </a:r>
           </a:p>
         </p:txBody>
@@ -5603,7 +5603,7 @@
       </p:cxnSp>
       <p:sp>
         <p:nvSpPr>
-          <p:cNvPr id="10" name="layer__Core_Engine"/>
+          <p:cNvPr id="10" name="layer__Adapters"/>
           <p:cNvSpPr/>
           <p:nvPr/>
         </p:nvSpPr>
@@ -5616,7 +5616,7 @@
             <a:avLst/>
           </a:prstGeom>
           <a:solidFill>
-            <a:srgbClr val="EEE9FE"/>
+            <a:srgbClr val="DCFCE7"/>
           </a:solidFill>
           <a:ln w="9525">
             <a:solidFill>
@@ -5651,7 +5651,7 @@
                 </a:solidFill>
                 <a:latin typeface="Calibri"/>
               </a:rPr>
-              <a:t>Core Engine</a:t>
+              <a:t>Adapters</a:t>
             </a:r>
           </a:p>
           <a:p>
@@ -5663,7 +5663,7 @@
                 </a:solidFill>
                 <a:latin typeface="Calibri"/>
               </a:rPr>
-              <a:t>thread-safe · context · schemas (job_run · task_run · dataset_event)</a:t>
+              <a:t>@kage_dlt_table · emit_dbt_run_results · kage_task_callbacks · KageLangChainCallback</a:t>
             </a:r>
           </a:p>
         </p:txBody>
@@ -5706,7 +5706,7 @@
       </p:cxnSp>
       <p:sp>
         <p:nvSpPr>
-          <p:cNvPr id="12" name="layer__Transports"/>
+          <p:cNvPr id="12" name="layer__Core_Engine"/>
           <p:cNvSpPr/>
           <p:nvPr/>
         </p:nvSpPr>
@@ -5719,7 +5719,7 @@
             <a:avLst/>
           </a:prstGeom>
           <a:solidFill>
-            <a:srgbClr val="DCFCE7"/>
+            <a:srgbClr val="EEE9FE"/>
           </a:solidFill>
           <a:ln w="9525">
             <a:solidFill>
@@ -5754,7 +5754,7 @@
                 </a:solidFill>
                 <a:latin typeface="Calibri"/>
               </a:rPr>
-              <a:t>Transports</a:t>
+              <a:t>Core Engine</a:t>
             </a:r>
           </a:p>
           <a:p>
@@ -5766,7 +5766,7 @@
                 </a:solidFill>
                 <a:latin typeface="Calibri"/>
               </a:rPr>
-              <a:t>MultiTransport → FileTransport (JSONL) · StdoutTransport</a:t>
+              <a:t>thread-safe lock · contextvars span stack · auto error capture · schemas</a:t>
             </a:r>
           </a:p>
         </p:txBody>
@@ -5972,7 +5972,7 @@
                 </a:solidFill>
                 <a:latin typeface="Calibri"/>
               </a:rPr>
-              <a:t>SLA · Medallion Health · Lineage · Cost · AI suggestions (ai_query)</a:t>
+              <a:t>SLA · Medallion Health · Lineage · Cost · Agentic call tree · AI suggestions</a:t>
             </a:r>
           </a:p>
         </p:txBody>
